--- a/test-corpus/word-verification/smartart-tree-recheck.pptx
+++ b/test-corpus/word-verification/smartart-tree-recheck.pptx
@@ -144,8 +144,8 @@
         </p:nvSpPr>
         <p:spPr>
           <a:xfrm>
-            <a:off x="5278507" y="1028700"/>
-            <a:ext cx="1634987" cy="1751772"/>
+            <a:off x="3228479" y="1263234"/>
+            <a:ext cx="1492227" cy="1598815"/>
           </a:xfrm>
           <a:prstGeom prst="rect">
             <a:avLst/>
@@ -153,7 +153,7 @@
           <a:solidFill>
             <a:srgbClr val="D9E2F3"/>
           </a:solidFill>
-          <a:ln w="31143" cap="flat" cmpd="sng" algn="ctr">
+          <a:ln w="28423" cap="flat" cmpd="sng" algn="ctr">
             <a:solidFill>
               <a:srgbClr val="2F5496"/>
             </a:solidFill>
@@ -177,7 +177,7 @@
           </a:fontRef>
         </p:style>
         <p:txBody>
-          <a:bodyPr rot="0" spcFirstLastPara="0" vertOverflow="overflow" horzOverflow="overflow" vert="horz" wrap="square" lIns="224227" tIns="112113" rIns="224227" bIns="112113" numCol="1" spcCol="0" rtlCol="0" fromWordArt="0" anchor="ctr" anchorCtr="0" forceAA="0" compatLnSpc="1">
+          <a:bodyPr rot="0" spcFirstLastPara="0" vertOverflow="overflow" horzOverflow="overflow" vert="horz" wrap="square" lIns="204648" tIns="102324" rIns="204648" bIns="102324" numCol="1" spcCol="0" rtlCol="0" fromWordArt="0" anchor="ctr" anchorCtr="0" forceAA="0" compatLnSpc="1">
             <a:prstTxWarp prst="textNoShape">
               <a:avLst/>
             </a:prstTxWarp>
@@ -194,7 +194,7 @@
               </a:spcAft>
             </a:pPr>
             <a:r>
-              <a:rPr lang="en-US" sz="2943" dirty="0">
+              <a:rPr lang="en-US" sz="2686" dirty="0">
                 <a:solidFill>
                   <a:srgbClr val="000000"/>
                 </a:solidFill>
@@ -212,8 +212,8 @@
         </p:nvSpPr>
         <p:spPr>
           <a:xfrm>
-            <a:off x="2242102" y="4649028"/>
-            <a:ext cx="1634987" cy="1751772"/>
+            <a:off x="457200" y="4567451"/>
+            <a:ext cx="1492227" cy="1598815"/>
           </a:xfrm>
           <a:prstGeom prst="rect">
             <a:avLst/>
@@ -221,7 +221,7 @@
           <a:solidFill>
             <a:srgbClr val="D9E2F3"/>
           </a:solidFill>
-          <a:ln w="31143" cap="flat" cmpd="sng" algn="ctr">
+          <a:ln w="28423" cap="flat" cmpd="sng" algn="ctr">
             <a:solidFill>
               <a:srgbClr val="2F5496"/>
             </a:solidFill>
@@ -245,7 +245,7 @@
           </a:fontRef>
         </p:style>
         <p:txBody>
-          <a:bodyPr rot="0" spcFirstLastPara="0" vertOverflow="overflow" horzOverflow="overflow" vert="horz" wrap="square" lIns="224227" tIns="112113" rIns="224227" bIns="112113" numCol="1" spcCol="0" rtlCol="0" fromWordArt="0" anchor="ctr" anchorCtr="0" forceAA="0" compatLnSpc="1">
+          <a:bodyPr rot="0" spcFirstLastPara="0" vertOverflow="overflow" horzOverflow="overflow" vert="horz" wrap="square" lIns="204648" tIns="102324" rIns="204648" bIns="102324" numCol="1" spcCol="0" rtlCol="0" fromWordArt="0" anchor="ctr" anchorCtr="0" forceAA="0" compatLnSpc="1">
             <a:prstTxWarp prst="textNoShape">
               <a:avLst/>
             </a:prstTxWarp>
@@ -262,7 +262,7 @@
               </a:spcAft>
             </a:pPr>
             <a:r>
-              <a:rPr lang="en-US" sz="2943" dirty="0">
+              <a:rPr lang="en-US" sz="2686" dirty="0">
                 <a:solidFill>
                   <a:srgbClr val="000000"/>
                 </a:solidFill>
@@ -280,8 +280,8 @@
         </p:nvSpPr>
         <p:spPr>
           <a:xfrm>
-            <a:off x="5278507" y="4649028"/>
-            <a:ext cx="1634987" cy="1751772"/>
+            <a:off x="3228479" y="4567451"/>
+            <a:ext cx="1492227" cy="1598815"/>
           </a:xfrm>
           <a:prstGeom prst="rect">
             <a:avLst/>
@@ -289,7 +289,7 @@
           <a:solidFill>
             <a:srgbClr val="D9E2F3"/>
           </a:solidFill>
-          <a:ln w="31143" cap="flat" cmpd="sng" algn="ctr">
+          <a:ln w="28423" cap="flat" cmpd="sng" algn="ctr">
             <a:solidFill>
               <a:srgbClr val="2F5496"/>
             </a:solidFill>
@@ -313,7 +313,7 @@
           </a:fontRef>
         </p:style>
         <p:txBody>
-          <a:bodyPr rot="0" spcFirstLastPara="0" vertOverflow="overflow" horzOverflow="overflow" vert="horz" wrap="square" lIns="224227" tIns="112113" rIns="224227" bIns="112113" numCol="1" spcCol="0" rtlCol="0" fromWordArt="0" anchor="ctr" anchorCtr="0" forceAA="0" compatLnSpc="1">
+          <a:bodyPr rot="0" spcFirstLastPara="0" vertOverflow="overflow" horzOverflow="overflow" vert="horz" wrap="square" lIns="204648" tIns="102324" rIns="204648" bIns="102324" numCol="1" spcCol="0" rtlCol="0" fromWordArt="0" anchor="ctr" anchorCtr="0" forceAA="0" compatLnSpc="1">
             <a:prstTxWarp prst="textNoShape">
               <a:avLst/>
             </a:prstTxWarp>
@@ -330,7 +330,7 @@
               </a:spcAft>
             </a:pPr>
             <a:r>
-              <a:rPr lang="en-US" sz="2943" dirty="0">
+              <a:rPr lang="en-US" sz="2686" dirty="0">
                 <a:solidFill>
                   <a:srgbClr val="000000"/>
                 </a:solidFill>
@@ -348,8 +348,8 @@
         </p:nvSpPr>
         <p:spPr>
           <a:xfrm>
-            <a:off x="8314911" y="4649028"/>
-            <a:ext cx="1634987" cy="1751772"/>
+            <a:off x="5999757" y="4567451"/>
+            <a:ext cx="1492227" cy="1598815"/>
           </a:xfrm>
           <a:prstGeom prst="rect">
             <a:avLst/>
@@ -357,7 +357,7 @@
           <a:solidFill>
             <a:srgbClr val="D9E2F3"/>
           </a:solidFill>
-          <a:ln w="31143" cap="flat" cmpd="sng" algn="ctr">
+          <a:ln w="28423" cap="flat" cmpd="sng" algn="ctr">
             <a:solidFill>
               <a:srgbClr val="2F5496"/>
             </a:solidFill>
@@ -381,7 +381,7 @@
           </a:fontRef>
         </p:style>
         <p:txBody>
-          <a:bodyPr rot="0" spcFirstLastPara="0" vertOverflow="overflow" horzOverflow="overflow" vert="horz" wrap="square" lIns="224227" tIns="112113" rIns="224227" bIns="112113" numCol="1" spcCol="0" rtlCol="0" fromWordArt="0" anchor="ctr" anchorCtr="0" forceAA="0" compatLnSpc="1">
+          <a:bodyPr rot="0" spcFirstLastPara="0" vertOverflow="overflow" horzOverflow="overflow" vert="horz" wrap="square" lIns="204648" tIns="102324" rIns="204648" bIns="102324" numCol="1" spcCol="0" rtlCol="0" fromWordArt="0" anchor="ctr" anchorCtr="0" forceAA="0" compatLnSpc="1">
             <a:prstTxWarp prst="textNoShape">
               <a:avLst/>
             </a:prstTxWarp>
@@ -398,7 +398,7 @@
               </a:spcAft>
             </a:pPr>
             <a:r>
-              <a:rPr lang="en-US" sz="2943" dirty="0">
+              <a:rPr lang="en-US" sz="2686" dirty="0">
                 <a:solidFill>
                   <a:srgbClr val="000000"/>
                 </a:solidFill>
@@ -419,13 +419,13 @@
         </p:nvCxnSpPr>
         <p:spPr>
           <a:xfrm flipH="1">
-            <a:off x="3059596" y="2780472"/>
-            <a:ext cx="3036404" cy="1868557"/>
+            <a:off x="1203313" y="2862049"/>
+            <a:ext cx="2771279" cy="1705402"/>
           </a:xfrm>
           <a:prstGeom prst="line">
             <a:avLst/>
           </a:prstGeom>
-          <a:ln w="31143" cap="flat" cmpd="sng" algn="ctr">
+          <a:ln w="28423" cap="flat" cmpd="sng" algn="ctr">
             <a:solidFill>
               <a:srgbClr val="2F5496"/>
             </a:solidFill>
@@ -459,13 +459,13 @@
         </p:nvCxnSpPr>
         <p:spPr>
           <a:xfrm>
-            <a:off x="6096000" y="2780472"/>
-            <a:ext cx="0" cy="1868557"/>
+            <a:off x="3974592" y="2862049"/>
+            <a:ext cx="0" cy="1705402"/>
           </a:xfrm>
           <a:prstGeom prst="line">
             <a:avLst/>
           </a:prstGeom>
-          <a:ln w="31143" cap="flat" cmpd="sng" algn="ctr">
+          <a:ln w="28423" cap="flat" cmpd="sng" algn="ctr">
             <a:solidFill>
               <a:srgbClr val="2F5496"/>
             </a:solidFill>
@@ -499,13 +499,13 @@
         </p:nvCxnSpPr>
         <p:spPr>
           <a:xfrm>
-            <a:off x="6096000" y="2780472"/>
-            <a:ext cx="3036404" cy="1868557"/>
+            <a:off x="3974592" y="2862049"/>
+            <a:ext cx="2771279" cy="1705402"/>
           </a:xfrm>
           <a:prstGeom prst="line">
             <a:avLst/>
           </a:prstGeom>
-          <a:ln w="31143" cap="flat" cmpd="sng" algn="ctr">
+          <a:ln w="28423" cap="flat" cmpd="sng" algn="ctr">
             <a:solidFill>
               <a:srgbClr val="2F5496"/>
             </a:solidFill>
@@ -528,6 +528,88 @@
           </a:fontRef>
         </p:style>
       </p:cxnSp>
+      <p:sp>
+        <p:nvSpPr>
+          <p:cNvPr id="4" name="Mermaid source"/>
+          <p:cNvSpPr/>
+          <p:nvPr/>
+        </p:nvSpPr>
+        <p:spPr>
+          <a:xfrm>
+            <a:off x="7674864" y="1028700"/>
+            <a:ext cx="4059936" cy="5372100"/>
+          </a:xfrm>
+          <a:prstGeom prst="rect">
+            <a:avLst/>
+          </a:prstGeom>
+          <a:solidFill>
+            <a:srgbClr val="F3F4F6"/>
+          </a:solidFill>
+          <a:ln w="9525">
+            <a:solidFill>
+              <a:srgbClr val="D1D5DB"/>
+            </a:solidFill>
+          </a:ln>
+        </p:spPr>
+        <p:txBody>
+          <a:bodyPr wrap="square" lIns="91440" tIns="45720" rIns="91440" bIns="45720" anchor="t">
+            <a:noAutofit/>
+          </a:bodyPr>
+          <a:lstStyle/>
+          <a:p>
+            <a:pPr algn="l"/>
+            <a:r>
+              <a:rPr lang="en-US" sz="1400" dirty="0">
+                <a:solidFill>
+                  <a:srgbClr val="1F2937"/>
+                </a:solidFill>
+                <a:latin typeface="Consolas"/>
+                <a:cs typeface="Consolas"/>
+              </a:rPr>
+              <a:t>graph TD</a:t>
+            </a:r>
+          </a:p>
+          <a:p>
+            <a:pPr algn="l"/>
+            <a:r>
+              <a:rPr lang="en-US" sz="1400" dirty="0">
+                <a:solidFill>
+                  <a:srgbClr val="1F2937"/>
+                </a:solidFill>
+                <a:latin typeface="Consolas"/>
+                <a:cs typeface="Consolas"/>
+              </a:rPr>
+              <a:t>  A --&gt; B</a:t>
+            </a:r>
+          </a:p>
+          <a:p>
+            <a:pPr algn="l"/>
+            <a:r>
+              <a:rPr lang="en-US" sz="1400" dirty="0">
+                <a:solidFill>
+                  <a:srgbClr val="1F2937"/>
+                </a:solidFill>
+                <a:latin typeface="Consolas"/>
+                <a:cs typeface="Consolas"/>
+              </a:rPr>
+              <a:t>  A --&gt; C</a:t>
+            </a:r>
+          </a:p>
+          <a:p>
+            <a:pPr algn="l"/>
+            <a:r>
+              <a:rPr lang="en-US" sz="1400" dirty="0">
+                <a:solidFill>
+                  <a:srgbClr val="1F2937"/>
+                </a:solidFill>
+                <a:latin typeface="Consolas"/>
+                <a:cs typeface="Consolas"/>
+              </a:rPr>
+              <a:t>  A --&gt; D</a:t>
+            </a:r>
+          </a:p>
+        </p:txBody>
+      </p:sp>
     </p:spTree>
   </p:cSld>
   <p:clrMapOvr>
